--- a/Week07_ModernJava.pptx
+++ b/Week07_ModernJava.pptx
@@ -4783,8 +4783,8 @@
         </p:nvSpPr>
         <p:spPr>
           <a:xfrm>
-            <a:off x="731520" y="365760"/>
-            <a:ext cx="2743200" cy="548640"/>
+            <a:off x="731520" y="228600"/>
+            <a:ext cx="1828800" cy="502920"/>
           </a:xfrm>
           <a:prstGeom prst="rect">
             <a:avLst/>
@@ -4798,7 +4798,7 @@
           <a:lstStyle/>
           <a:p>
             <a:pPr>
-              <a:defRPr sz="2800" b="1">
+              <a:defRPr sz="2600" b="1">
                 <a:solidFill>
                   <a:srgbClr val="0EA5E9"/>
                 </a:solidFill>
@@ -4819,8 +4819,8 @@
         </p:nvSpPr>
         <p:spPr>
           <a:xfrm>
-            <a:off x="731520" y="1097280"/>
-            <a:ext cx="7680960" cy="3657600"/>
+            <a:off x="731520" y="713232"/>
+            <a:ext cx="5486400" cy="320040"/>
           </a:xfrm>
           <a:prstGeom prst="rect">
             <a:avLst/>
@@ -4828,6 +4828,42 @@
           <a:noFill/>
         </p:spPr>
         <p:txBody>
+          <a:bodyPr wrap="none">
+            <a:spAutoFit/>
+          </a:bodyPr>
+          <a:lstStyle/>
+          <a:p>
+            <a:pPr>
+              <a:defRPr sz="1300">
+                <a:solidFill>
+                  <a:srgbClr val="CADCFC"/>
+                </a:solidFill>
+                <a:latin typeface="Calibri"/>
+              </a:defRPr>
+            </a:pPr>
+            <a:r>
+              <a:t>Week 07 — 다음 질문에 답해 보세요</a:t>
+            </a:r>
+          </a:p>
+        </p:txBody>
+      </p:sp>
+      <p:sp>
+        <p:nvSpPr>
+          <p:cNvPr id="6" name="TextBox 5"/>
+          <p:cNvSpPr txBox="1"/>
+          <p:nvPr/>
+        </p:nvSpPr>
+        <p:spPr>
+          <a:xfrm>
+            <a:off x="731520" y="1115568"/>
+            <a:ext cx="5029200" cy="3474720"/>
+          </a:xfrm>
+          <a:prstGeom prst="rect">
+            <a:avLst/>
+          </a:prstGeom>
+          <a:noFill/>
+        </p:spPr>
+        <p:txBody>
           <a:bodyPr wrap="square">
             <a:spAutoFit/>
           </a:bodyPr>
@@ -4835,9 +4871,9 @@
           <a:p>
             <a:pPr>
               <a:spcAft>
-                <a:spcPts val="1400"/>
-              </a:spcAft>
-              <a:defRPr sz="1600">
+                <a:spcPts val="1000"/>
+              </a:spcAft>
+              <a:defRPr sz="1400">
                 <a:solidFill>
                   <a:srgbClr val="FFFFFF"/>
                 </a:solidFill>
@@ -4845,15 +4881,15 @@
               </a:defRPr>
             </a:pPr>
             <a:r>
-              <a:t>Q1. 제네릭 타입 파라미터 T가 의미하는 것은?</a:t>
+              <a:t>Q1. `Box&lt;T&gt;`의 `T`는 언제 실제 타입으로 결정되는가?</a:t>
             </a:r>
           </a:p>
           <a:p>
             <a:pPr>
               <a:spcAft>
-                <a:spcPts val="1400"/>
-              </a:spcAft>
-              <a:defRPr sz="1600">
+                <a:spcPts val="1000"/>
+              </a:spcAft>
+              <a:defRPr sz="1400">
                 <a:solidFill>
                   <a:srgbClr val="FFFFFF"/>
                 </a:solidFill>
@@ -4861,15 +4897,15 @@
               </a:defRPr>
             </a:pPr>
             <a:r>
-              <a:t>Q2. 람다식 (a, b) -&gt; a * b 를 해석하시오</a:t>
+              <a:t>Q2. 람다식 `(a, b) -&gt; b.compareTo(a)`는 어떤 정렬 결과를 만드는가?</a:t>
             </a:r>
           </a:p>
           <a:p>
             <a:pPr>
               <a:spcAft>
-                <a:spcPts val="1400"/>
-              </a:spcAft>
-              <a:defRPr sz="1600">
+                <a:spcPts val="1000"/>
+              </a:spcAft>
+              <a:defRPr sz="1400">
                 <a:solidFill>
                   <a:srgbClr val="FFFFFF"/>
                 </a:solidFill>
@@ -4877,15 +4913,15 @@
               </a:defRPr>
             </a:pPr>
             <a:r>
-              <a:t>Q3. filter와 map의 차이는? 각각 언제 사용?</a:t>
+              <a:t>Q3. 메서드 참조 `System.out::println`은 어떤 람다식과 동일한가?</a:t>
             </a:r>
           </a:p>
           <a:p>
             <a:pPr>
               <a:spcAft>
-                <a:spcPts val="1400"/>
-              </a:spcAft>
-              <a:defRPr sz="1600">
+                <a:spcPts val="1000"/>
+              </a:spcAft>
+              <a:defRPr sz="1400">
                 <a:solidFill>
                   <a:srgbClr val="FFFFFF"/>
                 </a:solidFill>
@@ -4893,23 +4929,173 @@
               </a:defRPr>
             </a:pPr>
             <a:r>
-              <a:t>Q4. 메서드 참조 System.out::println은 어떤 함수형 인터페이스 대신?</a:t>
-            </a:r>
-          </a:p>
+              <a:t>Q4. 스트림에서 `filter()`와 `map()`은 각각 무슨 역할을 하는가?</a:t>
+            </a:r>
+          </a:p>
+        </p:txBody>
+      </p:sp>
+      <p:sp>
+        <p:nvSpPr>
+          <p:cNvPr id="7" name="Rectangle 6"/>
+          <p:cNvSpPr/>
+          <p:nvPr/>
+        </p:nvSpPr>
+        <p:spPr>
+          <a:xfrm>
+            <a:off x="5943600" y="1115568"/>
+            <a:ext cx="27432" cy="3474720"/>
+          </a:xfrm>
+          <a:prstGeom prst="rect">
+            <a:avLst/>
+          </a:prstGeom>
+          <a:solidFill>
+            <a:srgbClr val="3B527E"/>
+          </a:solidFill>
+          <a:ln>
+            <a:noFill/>
+          </a:ln>
+        </p:spPr>
+        <p:style>
+          <a:lnRef idx="1">
+            <a:schemeClr val="accent1"/>
+          </a:lnRef>
+          <a:fillRef idx="3">
+            <a:schemeClr val="accent1"/>
+          </a:fillRef>
+          <a:effectRef idx="2">
+            <a:schemeClr val="accent1"/>
+          </a:effectRef>
+          <a:fontRef idx="minor">
+            <a:schemeClr val="lt1"/>
+          </a:fontRef>
+        </p:style>
+        <p:txBody>
+          <a:bodyPr rtlCol="0" anchor="ctr"/>
+          <a:lstStyle/>
+          <a:p>
+            <a:pPr algn="ctr"/>
+          </a:p>
+        </p:txBody>
+      </p:sp>
+      <p:sp>
+        <p:nvSpPr>
+          <p:cNvPr id="8" name="TextBox 7"/>
+          <p:cNvSpPr txBox="1"/>
+          <p:nvPr/>
+        </p:nvSpPr>
+        <p:spPr>
+          <a:xfrm>
+            <a:off x="6080760" y="1115568"/>
+            <a:ext cx="2834640" cy="365760"/>
+          </a:xfrm>
+          <a:prstGeom prst="rect">
+            <a:avLst/>
+          </a:prstGeom>
+          <a:noFill/>
+        </p:spPr>
+        <p:txBody>
+          <a:bodyPr wrap="none">
+            <a:spAutoFit/>
+          </a:bodyPr>
+          <a:lstStyle/>
           <a:p>
             <a:pPr>
-              <a:spcAft>
-                <a:spcPts val="1400"/>
-              </a:spcAft>
-              <a:defRPr sz="1600">
-                <a:solidFill>
-                  <a:srgbClr val="FFFFFF"/>
+              <a:defRPr sz="1400" b="1">
+                <a:solidFill>
+                  <a:srgbClr val="0EA5E9"/>
+                </a:solidFill>
+                <a:latin typeface="Georgia"/>
+              </a:defRPr>
+            </a:pPr>
+            <a:r>
+              <a:t>추가 실습</a:t>
+            </a:r>
+          </a:p>
+        </p:txBody>
+      </p:sp>
+      <p:sp>
+        <p:nvSpPr>
+          <p:cNvPr id="9" name="TextBox 8"/>
+          <p:cNvSpPr txBox="1"/>
+          <p:nvPr/>
+        </p:nvSpPr>
+        <p:spPr>
+          <a:xfrm>
+            <a:off x="6080760" y="1499616"/>
+            <a:ext cx="2834640" cy="3108960"/>
+          </a:xfrm>
+          <a:prstGeom prst="rect">
+            <a:avLst/>
+          </a:prstGeom>
+          <a:noFill/>
+        </p:spPr>
+        <p:txBody>
+          <a:bodyPr wrap="square">
+            <a:spAutoFit/>
+          </a:bodyPr>
+          <a:lstStyle/>
+          <a:p>
+            <a:pPr>
+              <a:spcAft>
+                <a:spcPts val="800"/>
+              </a:spcAft>
+              <a:defRPr sz="1200">
+                <a:solidFill>
+                  <a:srgbClr val="CADCFC"/>
                 </a:solidFill>
                 <a:latin typeface="Calibri"/>
               </a:defRPr>
             </a:pPr>
             <a:r>
-              <a:t>Q5. 스트림의 지연 실행(lazy evaluation)이란?</a:t>
+              <a:t>① `Box&lt;Integer&gt;`로 정수를 담는 예제를 추가하기</a:t>
+            </a:r>
+          </a:p>
+          <a:p>
+            <a:pPr>
+              <a:spcAft>
+                <a:spcPts val="800"/>
+              </a:spcAft>
+              <a:defRPr sz="1200">
+                <a:solidFill>
+                  <a:srgbClr val="CADCFC"/>
+                </a:solidFill>
+                <a:latin typeface="Calibri"/>
+              </a:defRPr>
+            </a:pPr>
+            <a:r>
+              <a:t>② 문자열 길이순 정렬 람다를 직접 작성하기</a:t>
+            </a:r>
+          </a:p>
+          <a:p>
+            <a:pPr>
+              <a:spcAft>
+                <a:spcPts val="800"/>
+              </a:spcAft>
+              <a:defRPr sz="1200">
+                <a:solidFill>
+                  <a:srgbClr val="CADCFC"/>
+                </a:solidFill>
+                <a:latin typeface="Calibri"/>
+              </a:defRPr>
+            </a:pPr>
+            <a:r>
+              <a:t>③ 10보다 큰 수만 골라 2배로 만드는 스트림 파이프라인 작성하기</a:t>
+            </a:r>
+          </a:p>
+          <a:p>
+            <a:pPr>
+              <a:spcAft>
+                <a:spcPts val="800"/>
+              </a:spcAft>
+              <a:defRPr sz="1200">
+                <a:solidFill>
+                  <a:srgbClr val="CADCFC"/>
+                </a:solidFill>
+                <a:latin typeface="Calibri"/>
+              </a:defRPr>
+            </a:pPr>
+            <a:r>
+              <a:t>④ 스트림 없이 같은 로직을 반복문으로 구현해 비교하기</a:t>
             </a:r>
           </a:p>
         </p:txBody>
